--- a/Notes/Research_Project_Plan_Gantt_McKinley.pptx
+++ b/Notes/Research_Project_Plan_Gantt_McKinley.pptx
@@ -7407,7 +7407,7 @@
                 </a:solidFill>
                 <a:latin typeface="Arial"/>
               </a:rPr>
-              <a:t>In progress</a:t>
+              <a:t>Done</a:t>
             </a:r>
           </a:p>
         </p:txBody>
@@ -7427,7 +7427,7 @@
             <a:avLst/>
           </a:prstGeom>
           <a:solidFill>
-            <a:srgbClr val="E0A526"/>
+            <a:srgbClr val="595959"/>
           </a:solidFill>
           <a:ln>
             <a:noFill/>
@@ -7472,7 +7472,7 @@
                 </a:solidFill>
                 <a:latin typeface="Arial"/>
               </a:rPr>
-              <a:t>7. Progress meeting with Mina (1-2 slides)</a:t>
+              <a:t>7. Progress meeting with Mina (Stage 1 results)</a:t>
             </a:r>
           </a:p>
         </p:txBody>
@@ -7707,7 +7707,7 @@
                 </a:solidFill>
                 <a:latin typeface="Arial"/>
               </a:rPr>
-              <a:t>9. Interpretability follow-ups (attention vs. motifs, species subgroup check)</a:t>
+              <a:t>9. Interpretability follow-ups (species subgroup check, other attention layers and heads)</a:t>
             </a:r>
           </a:p>
         </p:txBody>
@@ -7942,7 +7942,7 @@
                 </a:solidFill>
                 <a:latin typeface="Arial"/>
               </a:rPr>
-              <a:t>Stage 2: Fusion and Benchmarking</a:t>
+              <a:t>Stages 2 to 4: Alignment, Fusion, and Benchmarking</a:t>
             </a:r>
           </a:p>
         </p:txBody>
@@ -7977,7 +7977,7 @@
                 </a:solidFill>
                 <a:latin typeface="Arial"/>
               </a:rPr>
-              <a:t>11. Codon-level alignment module (resample RNA and protein embeddings)</a:t>
+              <a:t>11. Stage 2: codon-grid alignment (resample RNA onto the protein codon grid)</a:t>
             </a:r>
           </a:p>
         </p:txBody>
@@ -8077,7 +8077,7 @@
                 </a:solidFill>
                 <a:latin typeface="Arial"/>
               </a:rPr>
-              <a:t>12. Baselines: single-modality and concatenation models</a:t>
+              <a:t>12. Stage 3: baselines (single-modality, concatenation + MLP)</a:t>
             </a:r>
           </a:p>
         </p:txBody>
@@ -8177,7 +8177,7 @@
                 </a:solidFill>
                 <a:latin typeface="Arial"/>
               </a:rPr>
-              <a:t>13. Cross-attention fusion model</a:t>
+              <a:t>13. Stage 3: cross-attention fusion model</a:t>
             </a:r>
           </a:p>
         </p:txBody>
@@ -8277,7 +8277,7 @@
                 </a:solidFill>
                 <a:latin typeface="Arial"/>
               </a:rPr>
-              <a:t>14. Coupled Mamba fusion model</a:t>
+              <a:t>14. Stage 3: Coupled Mamba fusion model</a:t>
             </a:r>
           </a:p>
         </p:txBody>
@@ -8377,7 +8377,7 @@
                 </a:solidFill>
                 <a:latin typeface="Arial"/>
               </a:rPr>
-              <a:t>15. Alignment-loss ablation (with vs. without explicit alignment)</a:t>
+              <a:t>15. Stage 3: alignment-loss ablation (with vs. without explicit alignment)</a:t>
             </a:r>
           </a:p>
         </p:txBody>
@@ -8477,7 +8477,7 @@
                 </a:solidFill>
                 <a:latin typeface="Arial"/>
               </a:rPr>
-              <a:t>16. Benchmark and statistics (5-fold CV, R-squared, Spearman)</a:t>
+              <a:t>16. Stage 4: benchmark and statistics (5-fold CV, R-squared, Spearman)</a:t>
             </a:r>
           </a:p>
         </p:txBody>
@@ -9913,7 +9913,7 @@
                 </a:solidFill>
                 <a:latin typeface="Arial"/>
               </a:rPr>
-              <a:t>Today (Sep 22, 2026)</a:t>
+              <a:t>Today (Sep 23, 2026)</a:t>
             </a:r>
           </a:p>
         </p:txBody>
